--- a/outputs/P1507変更管理_説明_評価まとめ追加.pptx
+++ b/outputs/P1507変更管理_説明_評価まとめ追加.pptx
@@ -18185,7 +18185,7 @@
           <a:p>
             <a:pPr>
               <a:spcAft>
-                <a:spcPts val="1000"/>
+                <a:spcPts val="800"/>
               </a:spcAft>
               <a:defRPr sz="1600" b="1">
                 <a:solidFill>
@@ -18194,7 +18194,7 @@
               </a:defRPr>
             </a:pPr>
             <a:r>
-              <a:t>評価したこと：閉塞が進んだときの①ポンプのキャビ余裕 ②下流CV開度で閉塞を監視できるか</a:t>
+              <a:t>評価したこと：①ポンプのキャビ余裕 ②下流CV開度で閉塞を監視できるか（実機データで照合）</a:t>
             </a:r>
           </a:p>
           <a:p>
@@ -18224,7 +18224,7 @@
               </a:defRPr>
             </a:pPr>
             <a:r>
-              <a:t>・CV開度で見えるか：閉塞してもCV開度はわずかしか動かない（FC-1531 +5%／FC-1535 +11%）。</a:t>
+              <a:t>・CV開度で見えるか：閉塞してもCV開度は +6〜8%（FC-1531 +8%／FC-1535 +6%）しか動かない。</a:t>
             </a:r>
           </a:p>
           <a:p>
@@ -18239,7 +18239,7 @@
               </a:defRPr>
             </a:pPr>
             <a:r>
-              <a:t>　→ 通常の流量変動（±5〜10%）に埋もれて “閉塞兆候として見えない”。</a:t>
+              <a:t>　→ 通常の流量変動（±5〜10%）と同程度。流量補正すれば弱い兆候にはなるが、単独では当てにできない。</a:t>
             </a:r>
           </a:p>
           <a:p>
@@ -18254,7 +18254,7 @@
               </a:defRPr>
             </a:pPr>
             <a:r>
-              <a:t>・結論：閉塞監視は ストレーナ前後差圧を直接見る（限界117kPaの手前で予備機切替・清掃）。FC開度は補助。</a:t>
+              <a:t>・結論：閉塞監視は ストレーナ前後差圧を直接見る（限界117kPaの手前で予備機切替・清掃）。CV開度は補助。</a:t>
             </a:r>
           </a:p>
           <a:p>
@@ -18337,7 +18337,7 @@
               </a:defRPr>
             </a:pPr>
             <a:r>
-              <a:t>差圧は閉塞末期(約83%)で急増しキャビ余裕を失う。CV開度はこの間ほとんど動かないため、差圧の直接監視が要。</a:t>
+              <a:t>差圧は閉塞末期(約83%)で急増。CV開度はその間±数%しか動かず流量変動に紛れるため、差圧の直接監視が要。</a:t>
             </a:r>
           </a:p>
         </p:txBody>

--- a/outputs/P1507変更管理_説明_評価まとめ追加.pptx
+++ b/outputs/P1507変更管理_説明_評価まとめ追加.pptx
@@ -16,6 +16,7 @@
   <p:sldIdLst>
     <p:sldId id="278" r:id="rId5"/>
     <p:sldId id="279" r:id="rId12"/>
+    <p:sldId id="280" r:id="rId13"/>
   </p:sldIdLst>
   <p:sldSz cx="12192000" cy="6858000"/>
   <p:notesSz cx="6858000" cy="9144000"/>
@@ -18329,15 +18330,352 @@
           </a:bodyPr>
           <a:lstStyle/>
           <a:p>
+            <a:r>
+              <a:t>差圧は閉塞末期(約83%)で急増するが、吐出圧・差圧にDCSタグは無く直読不可。CV開度は±数%で流量変動に紛れ補助のみ。→ 監視は『清掃周期＋現場パトロール』が主軸。</a:t>
+            </a:r>
+          </a:p>
+        </p:txBody>
+      </p:sp>
+    </p:spTree>
+  </p:cSld>
+  <p:clrMapOvr>
+    <a:masterClrMapping/>
+  </p:clrMapOvr>
+</p:sld>
+</file>
+
+<file path=ppt/slides/slide3.xml><?xml version="1.0" encoding="utf-8"?>
+<p:sld xmlns:a="http://schemas.openxmlformats.org/drawingml/2006/main" xmlns:p="http://schemas.openxmlformats.org/presentationml/2006/main" xmlns:r="http://schemas.openxmlformats.org/officeDocument/2006/relationships">
+  <p:cSld>
+    <p:spTree>
+      <p:nvGrpSpPr>
+        <p:cNvPr id="1" name=""/>
+        <p:cNvGrpSpPr/>
+        <p:nvPr/>
+      </p:nvGrpSpPr>
+      <p:grpSpPr/>
+      <p:sp>
+        <p:nvSpPr>
+          <p:cNvPr id="2" name="Rectangle 1"/>
+          <p:cNvSpPr/>
+          <p:nvPr/>
+        </p:nvSpPr>
+        <p:spPr>
+          <a:xfrm>
+            <a:off x="0" y="0"/>
+            <a:ext cx="12192000" cy="777240"/>
+          </a:xfrm>
+          <a:prstGeom prst="rect">
+            <a:avLst/>
+          </a:prstGeom>
+          <a:solidFill>
+            <a:srgbClr val="1F4E79"/>
+          </a:solidFill>
+          <a:ln>
+            <a:noFill/>
+          </a:ln>
+        </p:spPr>
+        <p:style>
+          <a:lnRef idx="1">
+            <a:schemeClr val="accent1"/>
+          </a:lnRef>
+          <a:fillRef idx="3">
+            <a:schemeClr val="accent1"/>
+          </a:fillRef>
+          <a:effectRef idx="2">
+            <a:schemeClr val="accent1"/>
+          </a:effectRef>
+          <a:fontRef idx="minor">
+            <a:schemeClr val="lt1"/>
+          </a:fontRef>
+        </p:style>
+        <p:txBody>
+          <a:bodyPr rtlCol="0" anchor="ctr" wrap="square" lIns="365760"/>
+          <a:lstStyle/>
+          <a:p>
             <a:pPr>
-              <a:defRPr sz="1100">
+              <a:defRPr sz="2400" b="1">
                 <a:solidFill>
-                  <a:srgbClr val="555555"/>
+                  <a:srgbClr val="FFFFFF"/>
                 </a:solidFill>
               </a:defRPr>
             </a:pPr>
             <a:r>
-              <a:t>差圧は閉塞末期(約83%)で急増。CV開度はその間±数%しか動かず流量変動に紛れるため、差圧の直接監視が要。</a:t>
+              <a:t>監視方法と清掃周期の見積り（落としどころ）</a:t>
+            </a:r>
+          </a:p>
+        </p:txBody>
+      </p:sp>
+      <p:sp>
+        <p:nvSpPr>
+          <p:cNvPr id="3" name="TextBox 2"/>
+          <p:cNvSpPr txBox="1"/>
+          <p:nvPr/>
+        </p:nvSpPr>
+        <p:spPr>
+          <a:xfrm>
+            <a:off x="365760" y="960120"/>
+            <a:ext cx="6492240" cy="5120640"/>
+          </a:xfrm>
+          <a:prstGeom prst="rect">
+            <a:avLst/>
+          </a:prstGeom>
+          <a:noFill/>
+        </p:spPr>
+        <p:txBody>
+          <a:bodyPr wrap="square">
+            <a:spAutoFit/>
+          </a:bodyPr>
+          <a:lstStyle/>
+          <a:p>
+            <a:pPr>
+              <a:defRPr sz="1600" b="1">
+                <a:solidFill>
+                  <a:srgbClr val="1F4E79"/>
+                </a:solidFill>
+              </a:defRPr>
+            </a:pPr>
+            <a:r>
+              <a:t>監視の実態（制約）</a:t>
+            </a:r>
+          </a:p>
+          <a:p>
+            <a:pPr>
+              <a:defRPr sz="1400" b="0"/>
+            </a:pPr>
+            <a:r>
+              <a:t>• 吐出圧・差圧にDCSタグは無い → 差圧の直読は不可</a:t>
+            </a:r>
+          </a:p>
+          <a:p>
+            <a:pPr>
+              <a:defRPr sz="1400" b="0"/>
+            </a:pPr>
+            <a:r>
+              <a:t>• 読めるのは ①CV開度トレンド(DCS) ②現場パトロール(1日1回・吐出圧/予備機サクションPG)</a:t>
+            </a:r>
+          </a:p>
+          <a:p>
+            <a:pPr>
+              <a:defRPr sz="1400" b="0"/>
+            </a:pPr>
+          </a:p>
+          <a:p>
+            <a:pPr>
+              <a:defRPr sz="1600" b="1">
+                <a:solidFill>
+                  <a:srgbClr val="377D22"/>
+                </a:solidFill>
+              </a:defRPr>
+            </a:pPr>
+            <a:r>
+              <a:t>運用の落としどころ（清掃周期を主軸に管理）</a:t>
+            </a:r>
+          </a:p>
+          <a:p>
+            <a:pPr>
+              <a:defRPr sz="1400" b="0"/>
+            </a:pPr>
+            <a:r>
+              <a:t>• ① 起動時に閉塞速度（どれくらいで差圧が立つか）を現場で実測</a:t>
+            </a:r>
+          </a:p>
+          <a:p>
+            <a:pPr>
+              <a:defRPr sz="1400" b="0"/>
+            </a:pPr>
+            <a:r>
+              <a:t>• ② CV開度トレンド＋現場パトロールで進行を監視（CV開度は“弱い兆候”の補助）</a:t>
+            </a:r>
+          </a:p>
+          <a:p>
+            <a:pPr>
+              <a:defRPr sz="1400" b="0"/>
+            </a:pPr>
+            <a:r>
+              <a:t>• ③ 清掃周期は操油課の250メッシュ実績を ろ過面積比＋流量比 で換算して定量見積り</a:t>
+            </a:r>
+          </a:p>
+          <a:p>
+            <a:pPr>
+              <a:defRPr sz="1400" b="0"/>
+            </a:pPr>
+            <a:r>
+              <a:t>• ④ 初期は安全側で『推定周期の1/2』で開放点検 → 実績で延伸・補正</a:t>
+            </a:r>
+          </a:p>
+        </p:txBody>
+      </p:sp>
+      <p:sp>
+        <p:nvSpPr>
+          <p:cNvPr id="4" name="TextBox 3"/>
+          <p:cNvSpPr txBox="1"/>
+          <p:nvPr/>
+        </p:nvSpPr>
+        <p:spPr>
+          <a:xfrm>
+            <a:off x="7040880" y="2926080"/>
+            <a:ext cx="4754880" cy="4937760"/>
+          </a:xfrm>
+          <a:prstGeom prst="rect">
+            <a:avLst/>
+          </a:prstGeom>
+          <a:noFill/>
+        </p:spPr>
+        <p:txBody>
+          <a:bodyPr wrap="square">
+            <a:spAutoFit/>
+          </a:bodyPr>
+          <a:lstStyle/>
+          <a:p>
+            <a:pPr>
+              <a:defRPr sz="1500" b="1">
+                <a:solidFill>
+                  <a:srgbClr val="C00000"/>
+                </a:solidFill>
+              </a:defRPr>
+            </a:pPr>
+            <a:r>
+              <a:t>操油課へ照会中（★回答待ち）</a:t>
+            </a:r>
+          </a:p>
+          <a:p>
+            <a:pPr>
+              <a:defRPr sz="1400" b="0"/>
+            </a:pPr>
+            <a:r>
+              <a:t>• ・250メッシュの清掃(閉塞)周期</a:t>
+            </a:r>
+          </a:p>
+          <a:p>
+            <a:pPr>
+              <a:defRPr sz="1400" b="0"/>
+            </a:pPr>
+            <a:r>
+              <a:t>• ・閉塞時の差圧の上がり方／状況</a:t>
+            </a:r>
+          </a:p>
+          <a:p>
+            <a:pPr>
+              <a:defRPr sz="1400" b="0"/>
+            </a:pPr>
+            <a:r>
+              <a:t>• ・ストレーナのろ過面積・通液流量</a:t>
+            </a:r>
+          </a:p>
+          <a:p>
+            <a:pPr>
+              <a:defRPr sz="1400" b="0"/>
+            </a:pPr>
+          </a:p>
+          <a:p>
+            <a:pPr>
+              <a:defRPr sz="1300" b="0"/>
+            </a:pPr>
+            <a:r>
+              <a:t>回答が来れば入力するだけで当方の</a:t>
+            </a:r>
+          </a:p>
+          <a:p>
+            <a:pPr>
+              <a:defRPr sz="1300" b="0"/>
+            </a:pPr>
+            <a:r>
+              <a:t>清掃周期が定量的に出る（Excel⑤）。</a:t>
+            </a:r>
+          </a:p>
+          <a:p>
+            <a:pPr>
+              <a:defRPr sz="1300" b="1">
+                <a:solidFill>
+                  <a:srgbClr val="377D22"/>
+                </a:solidFill>
+              </a:defRPr>
+            </a:pPr>
+            <a:r>
+              <a:t>その周期で運用し、初期は早めに点検。</a:t>
+            </a:r>
+          </a:p>
+        </p:txBody>
+      </p:sp>
+      <p:sp>
+        <p:nvSpPr>
+          <p:cNvPr id="5" name="Rectangle 4"/>
+          <p:cNvSpPr/>
+          <p:nvPr/>
+        </p:nvSpPr>
+        <p:spPr>
+          <a:xfrm>
+            <a:off x="6949440" y="960120"/>
+            <a:ext cx="4937760" cy="1828800"/>
+          </a:xfrm>
+          <a:prstGeom prst="rect">
+            <a:avLst/>
+          </a:prstGeom>
+          <a:solidFill>
+            <a:srgbClr val="EAF1F8"/>
+          </a:solidFill>
+          <a:ln>
+            <a:solidFill>
+              <a:srgbClr val="1F4E79"/>
+            </a:solidFill>
+          </a:ln>
+        </p:spPr>
+        <p:style>
+          <a:lnRef idx="1">
+            <a:schemeClr val="accent1"/>
+          </a:lnRef>
+          <a:fillRef idx="3">
+            <a:schemeClr val="accent1"/>
+          </a:fillRef>
+          <a:effectRef idx="2">
+            <a:schemeClr val="accent1"/>
+          </a:effectRef>
+          <a:fontRef idx="minor">
+            <a:schemeClr val="lt1"/>
+          </a:fontRef>
+        </p:style>
+        <p:txBody>
+          <a:bodyPr rtlCol="0" anchor="ctr" wrap="square"/>
+          <a:lstStyle/>
+          <a:p>
+            <a:pPr>
+              <a:defRPr sz="1400" b="1">
+                <a:solidFill>
+                  <a:srgbClr val="1F4E79"/>
+                </a:solidFill>
+              </a:defRPr>
+            </a:pPr>
+            <a:r>
+              <a:t>清掃までの時間 t ∝ ろ過面積 ÷ (流量 × 固形分濃度)</a:t>
+            </a:r>
+          </a:p>
+          <a:p>
+            <a:pPr>
+              <a:defRPr sz="1300"/>
+            </a:pPr>
+            <a:r>
+              <a:t>推定周期 = 操油課周期 ×(当方面積/操油課面積)</a:t>
+            </a:r>
+          </a:p>
+          <a:p>
+            <a:pPr>
+              <a:defRPr sz="1300"/>
+            </a:pPr>
+            <a:r>
+              <a:t>          ×(操油課流量/当方流量)×濃度比</a:t>
+            </a:r>
+          </a:p>
+          <a:p>
+            <a:pPr>
+              <a:defRPr sz="1200">
+                <a:solidFill>
+                  <a:srgbClr val="377D22"/>
+                </a:solidFill>
+              </a:defRPr>
+            </a:pPr>
+            <a:r>
+              <a:t>当方ろ過面積=101cm²（②円錐式より）</a:t>
             </a:r>
           </a:p>
         </p:txBody>

--- a/outputs/P1507変更管理_説明_評価まとめ追加.pptx
+++ b/outputs/P1507変更管理_説明_評価まとめ追加.pptx
@@ -17,6 +17,7 @@
     <p:sldId id="278" r:id="rId5"/>
     <p:sldId id="279" r:id="rId12"/>
     <p:sldId id="280" r:id="rId13"/>
+    <p:sldId id="281" r:id="rId14"/>
   </p:sldIdLst>
   <p:sldSz cx="12192000" cy="6858000"/>
   <p:notesSz cx="6858000" cy="9144000"/>
@@ -18356,52 +18357,21 @@
       <p:grpSpPr/>
       <p:sp>
         <p:nvSpPr>
-          <p:cNvPr id="2" name="Rectangle 1"/>
-          <p:cNvSpPr/>
-          <p:nvPr/>
+          <p:cNvPr id="2" name="Title 1"/>
+          <p:cNvSpPr>
+            <a:spLocks noGrp="1"/>
+          </p:cNvSpPr>
+          <p:nvPr>
+            <p:ph type="title"/>
+          </p:nvPr>
         </p:nvSpPr>
-        <p:spPr>
-          <a:xfrm>
-            <a:off x="0" y="0"/>
-            <a:ext cx="12192000" cy="777240"/>
-          </a:xfrm>
-          <a:prstGeom prst="rect">
-            <a:avLst/>
-          </a:prstGeom>
-          <a:solidFill>
-            <a:srgbClr val="1F4E79"/>
-          </a:solidFill>
-          <a:ln>
-            <a:noFill/>
-          </a:ln>
-        </p:spPr>
-        <p:style>
-          <a:lnRef idx="1">
-            <a:schemeClr val="accent1"/>
-          </a:lnRef>
-          <a:fillRef idx="3">
-            <a:schemeClr val="accent1"/>
-          </a:fillRef>
-          <a:effectRef idx="2">
-            <a:schemeClr val="accent1"/>
-          </a:effectRef>
-          <a:fontRef idx="minor">
-            <a:schemeClr val="lt1"/>
-          </a:fontRef>
-        </p:style>
+        <p:spPr/>
         <p:txBody>
-          <a:bodyPr rtlCol="0" anchor="ctr" wrap="square" lIns="365760"/>
+          <a:bodyPr/>
           <a:lstStyle/>
           <a:p>
-            <a:pPr>
-              <a:defRPr sz="2400" b="1">
-                <a:solidFill>
-                  <a:srgbClr val="FFFFFF"/>
-                </a:solidFill>
-              </a:defRPr>
-            </a:pPr>
-            <a:r>
-              <a:t>監視方法と清掃周期の見積り（落としどころ）</a:t>
+            <a:r>
+              <a:t>P-1507A/B 吸入ストレーナ変更　監視方法と清掃周期の見積り</a:t>
             </a:r>
           </a:p>
         </p:txBody>
@@ -18414,8 +18384,8 @@
         </p:nvSpPr>
         <p:spPr>
           <a:xfrm>
-            <a:off x="365760" y="960120"/>
-            <a:ext cx="6492240" cy="5120640"/>
+            <a:off x="457200" y="1005840"/>
+            <a:ext cx="11247120" cy="5120640"/>
           </a:xfrm>
           <a:prstGeom prst="rect">
             <a:avLst/>
@@ -18428,80 +18398,257 @@
           </a:bodyPr>
           <a:lstStyle/>
           <a:p>
-            <a:pPr>
-              <a:defRPr sz="1600" b="1">
-                <a:solidFill>
-                  <a:srgbClr val="1F4E79"/>
-                </a:solidFill>
-              </a:defRPr>
-            </a:pPr>
-            <a:r>
+            <a:r>
+              <a:rPr b="1" sz="1500"/>
               <a:t>監視の実態（制約）</a:t>
             </a:r>
           </a:p>
           <a:p>
-            <a:pPr>
-              <a:defRPr sz="1400" b="0"/>
-            </a:pPr>
-            <a:r>
-              <a:t>• 吐出圧・差圧にDCSタグは無い → 差圧の直読は不可</a:t>
-            </a:r>
-          </a:p>
-          <a:p>
-            <a:pPr>
-              <a:defRPr sz="1400" b="0"/>
-            </a:pPr>
-            <a:r>
-              <a:t>• 読めるのは ①CV開度トレンド(DCS) ②現場パトロール(1日1回・吐出圧/予備機サクションPG)</a:t>
-            </a:r>
-          </a:p>
-          <a:p>
-            <a:pPr>
-              <a:defRPr sz="1400" b="0"/>
-            </a:pPr>
-          </a:p>
-          <a:p>
-            <a:pPr>
-              <a:defRPr sz="1600" b="1">
-                <a:solidFill>
-                  <a:srgbClr val="377D22"/>
-                </a:solidFill>
-              </a:defRPr>
-            </a:pPr>
-            <a:r>
+            <a:r>
+              <a:rPr b="0" sz="1400"/>
+              <a:t>・吐出圧／差圧にDCSタグは無く、差圧の直読は不可。読めるのはCV開度トレンド(DCS)と現場パトロール(1日1回・吐出圧/予備機サクションPG)のみ。</a:t>
+            </a:r>
+          </a:p>
+          <a:p>
+            <a:r>
+              <a:rPr b="1" sz="1400"/>
+              <a:t/>
+            </a:r>
+          </a:p>
+          <a:p>
+            <a:r>
+              <a:rPr b="1" sz="1500"/>
               <a:t>運用の落としどころ（清掃周期を主軸に管理）</a:t>
             </a:r>
           </a:p>
           <a:p>
-            <a:pPr>
-              <a:defRPr sz="1400" b="0"/>
-            </a:pPr>
-            <a:r>
-              <a:t>• ① 起動時に閉塞速度（どれくらいで差圧が立つか）を現場で実測</a:t>
-            </a:r>
-          </a:p>
-          <a:p>
-            <a:pPr>
-              <a:defRPr sz="1400" b="0"/>
-            </a:pPr>
-            <a:r>
-              <a:t>• ② CV開度トレンド＋現場パトロールで進行を監視（CV開度は“弱い兆候”の補助）</a:t>
-            </a:r>
-          </a:p>
-          <a:p>
-            <a:pPr>
-              <a:defRPr sz="1400" b="0"/>
-            </a:pPr>
-            <a:r>
-              <a:t>• ③ 清掃周期は操油課の250メッシュ実績を ろ過面積比＋流量比 で換算して定量見積り</a:t>
-            </a:r>
-          </a:p>
-          <a:p>
-            <a:pPr>
-              <a:defRPr sz="1400" b="0"/>
-            </a:pPr>
-            <a:r>
-              <a:t>• ④ 初期は安全側で『推定周期の1/2』で開放点検 → 実績で延伸・補正</a:t>
+            <a:r>
+              <a:rPr b="0" sz="1400"/>
+              <a:t>① 起動時に差圧の立ち方（どの期間でどれくらい上がるか）を現場で実測する。</a:t>
+            </a:r>
+          </a:p>
+          <a:p>
+            <a:r>
+              <a:rPr b="0" sz="1400"/>
+              <a:t>② CV開度トレンド＋現場パトロールで進行を監視（CV開度は“弱い兆候”として補助）。</a:t>
+            </a:r>
+          </a:p>
+          <a:p>
+            <a:r>
+              <a:rPr b="0" sz="1400"/>
+              <a:t>③ 清掃周期は操油課250メッシュの差圧上昇実績をろ過面積比で当方へ換算して定量見積り。</a:t>
+            </a:r>
+          </a:p>
+          <a:p>
+            <a:r>
+              <a:rPr b="0" sz="1400"/>
+              <a:t>④ 初期は安全側で『推定周期の1/2』で開放点検し、実績で延伸・補正する。</a:t>
+            </a:r>
+          </a:p>
+          <a:p>
+            <a:r>
+              <a:rPr b="1" sz="1400"/>
+              <a:t/>
+            </a:r>
+          </a:p>
+          <a:p>
+            <a:r>
+              <a:rPr b="1" sz="1500"/>
+              <a:t>清掃周期の見積り式</a:t>
+            </a:r>
+          </a:p>
+          <a:p>
+            <a:r>
+              <a:rPr b="0" sz="1400"/>
+              <a:t>・推定清掃周期 ＝ 当方の許容差圧上昇 ÷ 当方の差圧上昇速度</a:t>
+            </a:r>
+          </a:p>
+          <a:p>
+            <a:r>
+              <a:rPr b="0" sz="1400"/>
+              <a:t>・当方の差圧上昇速度 ＝ 操油課の差圧上昇速度 ×（操油課ろ過面積 ÷ 当方ろ過面積101cm²）</a:t>
+            </a:r>
+          </a:p>
+          <a:p>
+            <a:r>
+              <a:rPr b="0" sz="1400"/>
+              <a:t>・当方の許容差圧上昇 ＝ キャビ限界117 − クリーン3.6 ≒ 113 kPa</a:t>
+            </a:r>
+          </a:p>
+          <a:p>
+            <a:r>
+              <a:rPr b="0" sz="1400"/>
+              <a:t>・操油課へ照会中（★回答待ち）：250メッシュの差圧の上がり方・期間、ろ過面積。回答を入力すれば当方周期が定量的に出る（Excel⑤）。</a:t>
+            </a:r>
+          </a:p>
+        </p:txBody>
+      </p:sp>
+    </p:spTree>
+  </p:cSld>
+  <p:clrMapOvr>
+    <a:masterClrMapping/>
+  </p:clrMapOvr>
+</p:sld>
+</file>
+
+<file path=ppt/slides/slide4.xml><?xml version="1.0" encoding="utf-8"?>
+<p:sld xmlns:a="http://schemas.openxmlformats.org/drawingml/2006/main" xmlns:p="http://schemas.openxmlformats.org/presentationml/2006/main" xmlns:r="http://schemas.openxmlformats.org/officeDocument/2006/relationships">
+  <p:cSld>
+    <p:spTree>
+      <p:nvGrpSpPr>
+        <p:cNvPr id="1" name=""/>
+        <p:cNvGrpSpPr/>
+        <p:nvPr/>
+      </p:nvGrpSpPr>
+      <p:grpSpPr/>
+      <p:sp>
+        <p:nvSpPr>
+          <p:cNvPr id="2" name="Title 1"/>
+          <p:cNvSpPr>
+            <a:spLocks noGrp="1"/>
+          </p:cNvSpPr>
+          <p:nvPr>
+            <p:ph type="title"/>
+          </p:nvPr>
+        </p:nvSpPr>
+        <p:spPr/>
+        <p:txBody>
+          <a:bodyPr/>
+          <a:lstStyle/>
+          <a:p>
+            <a:r>
+              <a:t>P-1507A/B DEG塔製品ポンプ　機器情報整理</a:t>
+            </a:r>
+          </a:p>
+        </p:txBody>
+      </p:sp>
+      <p:sp>
+        <p:nvSpPr>
+          <p:cNvPr id="3" name="TextBox 2"/>
+          <p:cNvSpPr txBox="1"/>
+          <p:nvPr/>
+        </p:nvSpPr>
+        <p:spPr>
+          <a:xfrm>
+            <a:off x="457200" y="1005840"/>
+            <a:ext cx="5760720" cy="5120640"/>
+          </a:xfrm>
+          <a:prstGeom prst="rect">
+            <a:avLst/>
+          </a:prstGeom>
+          <a:noFill/>
+        </p:spPr>
+        <p:txBody>
+          <a:bodyPr wrap="square">
+            <a:spAutoFit/>
+          </a:bodyPr>
+          <a:lstStyle/>
+          <a:p>
+            <a:r>
+              <a:rPr b="1" sz="1500"/>
+              <a:t>機器仕様</a:t>
+            </a:r>
+          </a:p>
+          <a:p>
+            <a:r>
+              <a:rPr b="1" sz="1400"/>
+              <a:t>名称</a:t>
+            </a:r>
+            <a:r>
+              <a:rPr sz="1400"/>
+              <a:t>：P-1507A/B DEG塔製品(ランダウン)ポンプ</a:t>
+            </a:r>
+          </a:p>
+          <a:p>
+            <a:r>
+              <a:rPr b="1" sz="1400"/>
+              <a:t>形式</a:t>
+            </a:r>
+            <a:r>
+              <a:rPr sz="1400"/>
+              <a:t>：横型遠心ポンプ（A=運転／B=予備）</a:t>
+            </a:r>
+          </a:p>
+          <a:p>
+            <a:r>
+              <a:rPr b="1" sz="1400"/>
+              <a:t>メーカー・図番</a:t>
+            </a:r>
+            <a:r>
+              <a:rPr sz="1400"/>
+              <a:t>：三菱重工業　図番 3444 J702-00046</a:t>
+            </a:r>
+          </a:p>
+          <a:p>
+            <a:r>
+              <a:rPr b="1" sz="1400"/>
+              <a:t>プロジェクト</a:t>
+            </a:r>
+            <a:r>
+              <a:rPr sz="1400"/>
+              <a:t>：KGC 531430</a:t>
+            </a:r>
+          </a:p>
+          <a:p>
+            <a:r>
+              <a:rPr b="1" sz="1400"/>
+              <a:t>材質</a:t>
+            </a:r>
+            <a:r>
+              <a:rPr sz="1400"/>
+              <a:t>：ケーシング/インペラ SCS13</a:t>
+            </a:r>
+          </a:p>
+          <a:p>
+            <a:r>
+              <a:rPr b="1" sz="1400"/>
+              <a:t/>
+            </a:r>
+          </a:p>
+          <a:p>
+            <a:r>
+              <a:rPr b="1" sz="1500"/>
+              <a:t>運転条件</a:t>
+            </a:r>
+          </a:p>
+          <a:p>
+            <a:r>
+              <a:rPr b="1" sz="1400"/>
+              <a:t>送液</a:t>
+            </a:r>
+            <a:r>
+              <a:rPr sz="1400"/>
+              <a:t>：DEG（ジエチレングリコール）</a:t>
+            </a:r>
+          </a:p>
+          <a:p>
+            <a:r>
+              <a:rPr b="1" sz="1400"/>
+              <a:t>ポンプ温度</a:t>
+            </a:r>
+            <a:r>
+              <a:rPr sz="1400"/>
+              <a:t>：158.8 ℃（実績 約150〜160℃）</a:t>
+            </a:r>
+          </a:p>
+          <a:p>
+            <a:r>
+              <a:rPr b="1" sz="1400"/>
+              <a:t>規定容量</a:t>
+            </a:r>
+            <a:r>
+              <a:rPr sz="1400"/>
+              <a:t>：9.8 m³/h（運転は約2.3〜2.7 m³/h＝部分流量）</a:t>
+            </a:r>
+          </a:p>
+          <a:p>
+            <a:r>
+              <a:rPr b="1" sz="1400"/>
+              <a:t>揚程</a:t>
+            </a:r>
+            <a:r>
+              <a:rPr sz="1400"/>
+              <a:t>：約61 m（吐出圧 約6.17 kg/cm²G）</a:t>
             </a:r>
           </a:p>
         </p:txBody>
@@ -18514,8 +18661,8 @@
         </p:nvSpPr>
         <p:spPr>
           <a:xfrm>
-            <a:off x="7040880" y="2926080"/>
-            <a:ext cx="4754880" cy="4937760"/>
+            <a:off x="6400800" y="1005840"/>
+            <a:ext cx="5394960" cy="5120640"/>
           </a:xfrm>
           <a:prstGeom prst="rect">
             <a:avLst/>
@@ -18528,154 +18675,174 @@
           </a:bodyPr>
           <a:lstStyle/>
           <a:p>
-            <a:pPr>
-              <a:defRPr sz="1500" b="1">
-                <a:solidFill>
-                  <a:srgbClr val="C00000"/>
-                </a:solidFill>
-              </a:defRPr>
-            </a:pPr>
-            <a:r>
-              <a:t>操油課へ照会中（★回答待ち）</a:t>
-            </a:r>
-          </a:p>
-          <a:p>
-            <a:pPr>
-              <a:defRPr sz="1400" b="0"/>
-            </a:pPr>
-            <a:r>
-              <a:t>• ・250メッシュの清掃(閉塞)周期</a:t>
-            </a:r>
-          </a:p>
-          <a:p>
-            <a:pPr>
-              <a:defRPr sz="1400" b="0"/>
-            </a:pPr>
-            <a:r>
-              <a:t>• ・閉塞時の差圧の上がり方／状況</a:t>
-            </a:r>
-          </a:p>
-          <a:p>
-            <a:pPr>
-              <a:defRPr sz="1400" b="0"/>
-            </a:pPr>
-            <a:r>
-              <a:t>• ・ストレーナのろ過面積・通液流量</a:t>
-            </a:r>
-          </a:p>
-          <a:p>
-            <a:pPr>
-              <a:defRPr sz="1400" b="0"/>
-            </a:pPr>
-          </a:p>
-          <a:p>
-            <a:pPr>
-              <a:defRPr sz="1300" b="0"/>
-            </a:pPr>
-            <a:r>
-              <a:t>回答が来れば入力するだけで当方の</a:t>
-            </a:r>
-          </a:p>
-          <a:p>
-            <a:pPr>
-              <a:defRPr sz="1300" b="0"/>
-            </a:pPr>
-            <a:r>
-              <a:t>清掃周期が定量的に出る（Excel⑤）。</a:t>
-            </a:r>
-          </a:p>
-          <a:p>
-            <a:pPr>
-              <a:defRPr sz="1300" b="1">
-                <a:solidFill>
-                  <a:srgbClr val="377D22"/>
-                </a:solidFill>
-              </a:defRPr>
-            </a:pPr>
-            <a:r>
-              <a:t>その周期で運用し、初期は早めに点検。</a:t>
+            <a:r>
+              <a:rPr b="1" sz="1500"/>
+              <a:t>DEG物性（Aspen＠158.8℃）</a:t>
+            </a:r>
+          </a:p>
+          <a:p>
+            <a:r>
+              <a:rPr b="1" sz="1400"/>
+              <a:t>密度 ρ</a:t>
+            </a:r>
+            <a:r>
+              <a:rPr sz="1400"/>
+              <a:t>：約1010 kg/m³（SG≈1.01）</a:t>
+            </a:r>
+          </a:p>
+          <a:p>
+            <a:r>
+              <a:rPr b="1" sz="1400"/>
+              <a:t>粘度 μ</a:t>
+            </a:r>
+            <a:r>
+              <a:rPr sz="1400"/>
+              <a:t>：約1.16 cP</a:t>
+            </a:r>
+          </a:p>
+          <a:p>
+            <a:r>
+              <a:rPr b="1" sz="1400"/>
+              <a:t>蒸気圧 Pvp</a:t>
+            </a:r>
+            <a:r>
+              <a:rPr sz="1400"/>
+              <a:t>：約5.5 kPa</a:t>
+            </a:r>
+          </a:p>
+          <a:p>
+            <a:r>
+              <a:rPr b="1" sz="1400"/>
+              <a:t/>
+            </a:r>
+          </a:p>
+          <a:p>
+            <a:r>
+              <a:rPr b="1" sz="1500"/>
+              <a:t>NPSH／キャビ余裕</a:t>
+            </a:r>
+          </a:p>
+          <a:p>
+            <a:r>
+              <a:rPr b="1" sz="1400"/>
+              <a:t>NPSHa</a:t>
+            </a:r>
+            <a:r>
+              <a:rPr sz="1400"/>
+              <a:t>：14.0 m ／ NPSHr 2.20 m（荏原 RM17156-13）</a:t>
+            </a:r>
+          </a:p>
+          <a:p>
+            <a:r>
+              <a:rPr b="1" sz="1400"/>
+              <a:t>余裕</a:t>
+            </a:r>
+            <a:r>
+              <a:rPr sz="1400"/>
+              <a:t>：11.8 m ≒ 117 kPa（＝許容差圧上昇）</a:t>
+            </a:r>
+          </a:p>
+          <a:p>
+            <a:r>
+              <a:rPr b="1" sz="1400"/>
+              <a:t/>
+            </a:r>
+          </a:p>
+          <a:p>
+            <a:r>
+              <a:rPr b="1" sz="1500"/>
+              <a:t>吸入ストレーナ（変更対象）</a:t>
+            </a:r>
+          </a:p>
+          <a:p>
+            <a:r>
+              <a:rPr b="1" sz="1400"/>
+              <a:t>形式</a:t>
+            </a:r>
+            <a:r>
+              <a:rPr sz="1400"/>
+              <a:t>：YAC EWPCL-150S 円錐型 2B</a:t>
+            </a:r>
+          </a:p>
+          <a:p>
+            <a:r>
+              <a:rPr b="1" sz="1400"/>
+              <a:t>ろ過面積</a:t>
+            </a:r>
+            <a:r>
+              <a:rPr sz="1400"/>
+              <a:t>：≒101 cm²（図面寸法より円錐側面積）</a:t>
+            </a:r>
+          </a:p>
+          <a:p>
+            <a:r>
+              <a:rPr b="1" sz="1400"/>
+              <a:t>メッシュ</a:t>
+            </a:r>
+            <a:r>
+              <a:rPr sz="1400"/>
+              <a:t>：40→250（目開き62μm）</a:t>
+            </a:r>
+          </a:p>
+          <a:p>
+            <a:r>
+              <a:rPr b="1" sz="1400"/>
+              <a:t/>
+            </a:r>
+          </a:p>
+          <a:p>
+            <a:r>
+              <a:rPr b="1" sz="1500"/>
+              <a:t>下流制御弁</a:t>
+            </a:r>
+          </a:p>
+          <a:p>
+            <a:r>
+              <a:rPr b="1" sz="1400"/>
+              <a:t>FC-1531</a:t>
+            </a:r>
+            <a:r>
+              <a:rPr sz="1400"/>
+              <a:t>：Azbil AGVB（Cv定格21）</a:t>
+            </a:r>
+          </a:p>
+          <a:p>
+            <a:r>
+              <a:rPr b="1" sz="1400"/>
+              <a:t>FC-1535</a:t>
+            </a:r>
+            <a:r>
+              <a:rPr sz="1400"/>
+              <a:t>：Azbil AGVB（Cv4.0）</a:t>
             </a:r>
           </a:p>
         </p:txBody>
       </p:sp>
       <p:sp>
         <p:nvSpPr>
-          <p:cNvPr id="5" name="Rectangle 4"/>
-          <p:cNvSpPr/>
+          <p:cNvPr id="5" name="TextBox 4"/>
+          <p:cNvSpPr txBox="1"/>
           <p:nvPr/>
         </p:nvSpPr>
         <p:spPr>
           <a:xfrm>
-            <a:off x="6949440" y="960120"/>
-            <a:ext cx="4937760" cy="1828800"/>
-          </a:xfrm>
-          <a:prstGeom prst="rect">
-            <a:avLst/>
-          </a:prstGeom>
-          <a:solidFill>
-            <a:srgbClr val="EAF1F8"/>
-          </a:solidFill>
-          <a:ln>
-            <a:solidFill>
-              <a:srgbClr val="1F4E79"/>
-            </a:solidFill>
-          </a:ln>
-        </p:spPr>
-        <p:style>
-          <a:lnRef idx="1">
-            <a:schemeClr val="accent1"/>
-          </a:lnRef>
-          <a:fillRef idx="3">
-            <a:schemeClr val="accent1"/>
-          </a:fillRef>
-          <a:effectRef idx="2">
-            <a:schemeClr val="accent1"/>
-          </a:effectRef>
-          <a:fontRef idx="minor">
-            <a:schemeClr val="lt1"/>
-          </a:fontRef>
-        </p:style>
+            <a:off x="457200" y="6199632"/>
+            <a:ext cx="11247120" cy="411480"/>
+          </a:xfrm>
+          <a:prstGeom prst="rect">
+            <a:avLst/>
+          </a:prstGeom>
+          <a:noFill/>
+        </p:spPr>
         <p:txBody>
-          <a:bodyPr rtlCol="0" anchor="ctr" wrap="square"/>
+          <a:bodyPr wrap="square">
+            <a:spAutoFit/>
+          </a:bodyPr>
           <a:lstStyle/>
           <a:p>
-            <a:pPr>
-              <a:defRPr sz="1400" b="1">
-                <a:solidFill>
-                  <a:srgbClr val="1F4E79"/>
-                </a:solidFill>
-              </a:defRPr>
-            </a:pPr>
-            <a:r>
-              <a:t>清掃までの時間 t ∝ ろ過面積 ÷ (流量 × 固形分濃度)</a:t>
-            </a:r>
-          </a:p>
-          <a:p>
-            <a:pPr>
-              <a:defRPr sz="1300"/>
-            </a:pPr>
-            <a:r>
-              <a:t>推定周期 = 操油課周期 ×(当方面積/操油課面積)</a:t>
-            </a:r>
-          </a:p>
-          <a:p>
-            <a:pPr>
-              <a:defRPr sz="1300"/>
-            </a:pPr>
-            <a:r>
-              <a:t>          ×(操油課流量/当方流量)×濃度比</a:t>
-            </a:r>
-          </a:p>
-          <a:p>
-            <a:pPr>
-              <a:defRPr sz="1200">
-                <a:solidFill>
-                  <a:srgbClr val="377D22"/>
-                </a:solidFill>
-              </a:defRPr>
-            </a:pPr>
-            <a:r>
-              <a:t>当方ろ過面積=101cm²（②円錐式より）</a:t>
+            <a:r>
+              <a:rPr sz="1000" i="1"/>
+              <a:t>出典：三菱重工 ポンプデータシート(図番3444 J702-00046)、荏原性能試験RM17156-13、Aspen物性、ストレーナ/ポンプ図面</a:t>
             </a:r>
           </a:p>
         </p:txBody>

--- a/outputs/P1507変更管理_説明_評価まとめ追加.pptx
+++ b/outputs/P1507変更管理_説明_評価まとめ追加.pptx
@@ -18522,302 +18522,1036 @@
           </a:p>
         </p:txBody>
       </p:sp>
-      <p:sp>
-        <p:nvSpPr>
-          <p:cNvPr id="3" name="TextBox 2"/>
-          <p:cNvSpPr txBox="1"/>
+      <p:graphicFrame>
+        <p:nvGraphicFramePr>
+          <p:cNvPr id="3" name="Table 2"/>
+          <p:cNvGraphicFramePr>
+            <a:graphicFrameLocks noGrp="1"/>
+          </p:cNvGraphicFramePr>
           <p:nvPr/>
-        </p:nvSpPr>
-        <p:spPr>
-          <a:xfrm>
-            <a:off x="457200" y="1005840"/>
-            <a:ext cx="5760720" cy="5120640"/>
-          </a:xfrm>
-          <a:prstGeom prst="rect">
-            <a:avLst/>
-          </a:prstGeom>
-          <a:noFill/>
-        </p:spPr>
-        <p:txBody>
-          <a:bodyPr wrap="square">
-            <a:spAutoFit/>
-          </a:bodyPr>
-          <a:lstStyle/>
-          <a:p>
-            <a:r>
-              <a:rPr b="1" sz="1500"/>
-              <a:t>機器仕様</a:t>
-            </a:r>
-          </a:p>
-          <a:p>
-            <a:r>
-              <a:rPr b="1" sz="1400"/>
-              <a:t>名称</a:t>
-            </a:r>
-            <a:r>
-              <a:rPr sz="1400"/>
-              <a:t>：P-1507A/B DEG塔製品(ランダウン)ポンプ</a:t>
-            </a:r>
-          </a:p>
-          <a:p>
-            <a:r>
-              <a:rPr b="1" sz="1400"/>
-              <a:t>形式</a:t>
-            </a:r>
-            <a:r>
-              <a:rPr sz="1400"/>
-              <a:t>：横型遠心ポンプ（A=運転／B=予備）</a:t>
-            </a:r>
-          </a:p>
-          <a:p>
-            <a:r>
-              <a:rPr b="1" sz="1400"/>
-              <a:t>メーカー・図番</a:t>
-            </a:r>
-            <a:r>
-              <a:rPr sz="1400"/>
-              <a:t>：三菱重工業　図番 3444 J702-00046</a:t>
-            </a:r>
-          </a:p>
-          <a:p>
-            <a:r>
-              <a:rPr b="1" sz="1400"/>
-              <a:t>プロジェクト</a:t>
-            </a:r>
-            <a:r>
-              <a:rPr sz="1400"/>
-              <a:t>：KGC 531430</a:t>
-            </a:r>
-          </a:p>
-          <a:p>
-            <a:r>
-              <a:rPr b="1" sz="1400"/>
-              <a:t>材質</a:t>
-            </a:r>
-            <a:r>
-              <a:rPr sz="1400"/>
-              <a:t>：ケーシング/インペラ SCS13</a:t>
-            </a:r>
-          </a:p>
-          <a:p>
-            <a:r>
-              <a:rPr b="1" sz="1400"/>
-              <a:t/>
-            </a:r>
-          </a:p>
-          <a:p>
-            <a:r>
-              <a:rPr b="1" sz="1500"/>
-              <a:t>運転条件</a:t>
-            </a:r>
-          </a:p>
-          <a:p>
-            <a:r>
-              <a:rPr b="1" sz="1400"/>
-              <a:t>送液</a:t>
-            </a:r>
-            <a:r>
-              <a:rPr sz="1400"/>
-              <a:t>：DEG（ジエチレングリコール）</a:t>
-            </a:r>
-          </a:p>
-          <a:p>
-            <a:r>
-              <a:rPr b="1" sz="1400"/>
-              <a:t>ポンプ温度</a:t>
-            </a:r>
-            <a:r>
-              <a:rPr sz="1400"/>
-              <a:t>：158.8 ℃（実績 約150〜160℃）</a:t>
-            </a:r>
-          </a:p>
-          <a:p>
-            <a:r>
-              <a:rPr b="1" sz="1400"/>
-              <a:t>規定容量</a:t>
-            </a:r>
-            <a:r>
-              <a:rPr sz="1400"/>
-              <a:t>：9.8 m³/h（運転は約2.3〜2.7 m³/h＝部分流量）</a:t>
-            </a:r>
-          </a:p>
-          <a:p>
-            <a:r>
-              <a:rPr b="1" sz="1400"/>
-              <a:t>揚程</a:t>
-            </a:r>
-            <a:r>
-              <a:rPr sz="1400"/>
-              <a:t>：約61 m（吐出圧 約6.17 kg/cm²G）</a:t>
-            </a:r>
-          </a:p>
-        </p:txBody>
-      </p:sp>
-      <p:sp>
-        <p:nvSpPr>
-          <p:cNvPr id="4" name="TextBox 3"/>
-          <p:cNvSpPr txBox="1"/>
+        </p:nvGraphicFramePr>
+        <p:xfrm>
+          <a:off x="411480" y="1051560"/>
+          <a:ext cx="5715000" cy="2743200"/>
+        </p:xfrm>
+        <a:graphic>
+          <a:graphicData uri="http://schemas.openxmlformats.org/drawingml/2006/table">
+            <a:tbl>
+              <a:tblPr firstRow="0" bandRow="0">
+                <a:tableStyleId>{5940675A-B579-460E-94D1-54222C63F5DA}</a:tableStyleId>
+              </a:tblPr>
+              <a:tblGrid>
+                <a:gridCol w="1783080"/>
+                <a:gridCol w="3931920"/>
+              </a:tblGrid>
+              <a:tr h="274320">
+                <a:tc gridSpan="2">
+                  <a:txBody>
+                    <a:bodyPr wrap="square"/>
+                    <a:lstStyle/>
+                    <a:p>
+                      <a:r>
+                        <a:rPr b="1" sz="1200">
+                          <a:solidFill>
+                            <a:srgbClr val="000000"/>
+                          </a:solidFill>
+                        </a:rPr>
+                        <a:t>■ 機器仕様</a:t>
+                      </a:r>
+                    </a:p>
+                  </a:txBody>
+                  <a:tcPr anchor="ctr" marT="12700" marB="12700">
+                    <a:solidFill>
+                      <a:srgbClr val="D9D9D9"/>
+                    </a:solidFill>
+                  </a:tcPr>
+                </a:tc>
+                <a:tc hMerge="1">
+                  <a:txBody>
+                    <a:bodyPr/>
+                    <a:lstStyle/>
+                    <a:p/>
+                  </a:txBody>
+                  <a:tcPr/>
+                </a:tc>
+              </a:tr>
+              <a:tr h="274320">
+                <a:tc>
+                  <a:txBody>
+                    <a:bodyPr wrap="square"/>
+                    <a:lstStyle/>
+                    <a:p>
+                      <a:r>
+                        <a:rPr sz="1150" b="1">
+                          <a:solidFill>
+                            <a:srgbClr val="000000"/>
+                          </a:solidFill>
+                        </a:rPr>
+                        <a:t>名称</a:t>
+                      </a:r>
+                    </a:p>
+                  </a:txBody>
+                  <a:tcPr anchor="ctr" marT="12700" marB="12700" marL="63500">
+                    <a:solidFill>
+                      <a:srgbClr val="FFFFFF"/>
+                    </a:solidFill>
+                  </a:tcPr>
+                </a:tc>
+                <a:tc>
+                  <a:txBody>
+                    <a:bodyPr wrap="square"/>
+                    <a:lstStyle/>
+                    <a:p>
+                      <a:r>
+                        <a:rPr sz="1150" b="0">
+                          <a:solidFill>
+                            <a:srgbClr val="000000"/>
+                          </a:solidFill>
+                        </a:rPr>
+                        <a:t>P-1507A/B DEG塔製品(ランダウン)ポンプ</a:t>
+                      </a:r>
+                    </a:p>
+                  </a:txBody>
+                  <a:tcPr anchor="ctr" marT="12700" marB="12700" marL="63500">
+                    <a:solidFill>
+                      <a:srgbClr val="FFFFFF"/>
+                    </a:solidFill>
+                  </a:tcPr>
+                </a:tc>
+              </a:tr>
+              <a:tr h="274320">
+                <a:tc>
+                  <a:txBody>
+                    <a:bodyPr wrap="square"/>
+                    <a:lstStyle/>
+                    <a:p>
+                      <a:r>
+                        <a:rPr sz="1150" b="1">
+                          <a:solidFill>
+                            <a:srgbClr val="000000"/>
+                          </a:solidFill>
+                        </a:rPr>
+                        <a:t>形式</a:t>
+                      </a:r>
+                    </a:p>
+                  </a:txBody>
+                  <a:tcPr anchor="ctr" marT="12700" marB="12700" marL="63500">
+                    <a:solidFill>
+                      <a:srgbClr val="FFFFFF"/>
+                    </a:solidFill>
+                  </a:tcPr>
+                </a:tc>
+                <a:tc>
+                  <a:txBody>
+                    <a:bodyPr wrap="square"/>
+                    <a:lstStyle/>
+                    <a:p>
+                      <a:r>
+                        <a:rPr sz="1150" b="0">
+                          <a:solidFill>
+                            <a:srgbClr val="000000"/>
+                          </a:solidFill>
+                        </a:rPr>
+                        <a:t>横型遠心ポンプ（A=運転／B=予備）</a:t>
+                      </a:r>
+                    </a:p>
+                  </a:txBody>
+                  <a:tcPr anchor="ctr" marT="12700" marB="12700" marL="63500">
+                    <a:solidFill>
+                      <a:srgbClr val="FFFFFF"/>
+                    </a:solidFill>
+                  </a:tcPr>
+                </a:tc>
+              </a:tr>
+              <a:tr h="274320">
+                <a:tc>
+                  <a:txBody>
+                    <a:bodyPr wrap="square"/>
+                    <a:lstStyle/>
+                    <a:p>
+                      <a:r>
+                        <a:rPr sz="1150" b="1">
+                          <a:solidFill>
+                            <a:srgbClr val="000000"/>
+                          </a:solidFill>
+                        </a:rPr>
+                        <a:t>メーカー・図番</a:t>
+                      </a:r>
+                    </a:p>
+                  </a:txBody>
+                  <a:tcPr anchor="ctr" marT="12700" marB="12700" marL="63500">
+                    <a:solidFill>
+                      <a:srgbClr val="FFFFFF"/>
+                    </a:solidFill>
+                  </a:tcPr>
+                </a:tc>
+                <a:tc>
+                  <a:txBody>
+                    <a:bodyPr wrap="square"/>
+                    <a:lstStyle/>
+                    <a:p>
+                      <a:r>
+                        <a:rPr sz="1150" b="0">
+                          <a:solidFill>
+                            <a:srgbClr val="000000"/>
+                          </a:solidFill>
+                        </a:rPr>
+                        <a:t>三菱重工業　図番 3444 J702-00046</a:t>
+                      </a:r>
+                    </a:p>
+                  </a:txBody>
+                  <a:tcPr anchor="ctr" marT="12700" marB="12700" marL="63500">
+                    <a:solidFill>
+                      <a:srgbClr val="FFFFFF"/>
+                    </a:solidFill>
+                  </a:tcPr>
+                </a:tc>
+              </a:tr>
+              <a:tr h="274320">
+                <a:tc>
+                  <a:txBody>
+                    <a:bodyPr wrap="square"/>
+                    <a:lstStyle/>
+                    <a:p>
+                      <a:r>
+                        <a:rPr sz="1150" b="1">
+                          <a:solidFill>
+                            <a:srgbClr val="000000"/>
+                          </a:solidFill>
+                        </a:rPr>
+                        <a:t>材質</a:t>
+                      </a:r>
+                    </a:p>
+                  </a:txBody>
+                  <a:tcPr anchor="ctr" marT="12700" marB="12700" marL="63500">
+                    <a:solidFill>
+                      <a:srgbClr val="FFFFFF"/>
+                    </a:solidFill>
+                  </a:tcPr>
+                </a:tc>
+                <a:tc>
+                  <a:txBody>
+                    <a:bodyPr wrap="square"/>
+                    <a:lstStyle/>
+                    <a:p>
+                      <a:r>
+                        <a:rPr sz="1150" b="0">
+                          <a:solidFill>
+                            <a:srgbClr val="000000"/>
+                          </a:solidFill>
+                        </a:rPr>
+                        <a:t>ケーシング/インペラ SCS13</a:t>
+                      </a:r>
+                    </a:p>
+                  </a:txBody>
+                  <a:tcPr anchor="ctr" marT="12700" marB="12700" marL="63500">
+                    <a:solidFill>
+                      <a:srgbClr val="FFFFFF"/>
+                    </a:solidFill>
+                  </a:tcPr>
+                </a:tc>
+              </a:tr>
+              <a:tr h="274320">
+                <a:tc gridSpan="2">
+                  <a:txBody>
+                    <a:bodyPr wrap="square"/>
+                    <a:lstStyle/>
+                    <a:p>
+                      <a:r>
+                        <a:rPr b="1" sz="1200">
+                          <a:solidFill>
+                            <a:srgbClr val="000000"/>
+                          </a:solidFill>
+                        </a:rPr>
+                        <a:t>■ 運転条件</a:t>
+                      </a:r>
+                    </a:p>
+                  </a:txBody>
+                  <a:tcPr anchor="ctr" marT="12700" marB="12700">
+                    <a:solidFill>
+                      <a:srgbClr val="D9D9D9"/>
+                    </a:solidFill>
+                  </a:tcPr>
+                </a:tc>
+                <a:tc hMerge="1">
+                  <a:txBody>
+                    <a:bodyPr/>
+                    <a:lstStyle/>
+                    <a:p/>
+                  </a:txBody>
+                  <a:tcPr/>
+                </a:tc>
+              </a:tr>
+              <a:tr h="274320">
+                <a:tc>
+                  <a:txBody>
+                    <a:bodyPr wrap="square"/>
+                    <a:lstStyle/>
+                    <a:p>
+                      <a:r>
+                        <a:rPr sz="1150" b="1">
+                          <a:solidFill>
+                            <a:srgbClr val="000000"/>
+                          </a:solidFill>
+                        </a:rPr>
+                        <a:t>送液</a:t>
+                      </a:r>
+                    </a:p>
+                  </a:txBody>
+                  <a:tcPr anchor="ctr" marT="12700" marB="12700" marL="63500">
+                    <a:solidFill>
+                      <a:srgbClr val="FFFFFF"/>
+                    </a:solidFill>
+                  </a:tcPr>
+                </a:tc>
+                <a:tc>
+                  <a:txBody>
+                    <a:bodyPr wrap="square"/>
+                    <a:lstStyle/>
+                    <a:p>
+                      <a:r>
+                        <a:rPr sz="1150" b="0">
+                          <a:solidFill>
+                            <a:srgbClr val="000000"/>
+                          </a:solidFill>
+                        </a:rPr>
+                        <a:t>DEG（ジエチレングリコール）</a:t>
+                      </a:r>
+                    </a:p>
+                  </a:txBody>
+                  <a:tcPr anchor="ctr" marT="12700" marB="12700" marL="63500">
+                    <a:solidFill>
+                      <a:srgbClr val="FFFFFF"/>
+                    </a:solidFill>
+                  </a:tcPr>
+                </a:tc>
+              </a:tr>
+              <a:tr h="274320">
+                <a:tc>
+                  <a:txBody>
+                    <a:bodyPr wrap="square"/>
+                    <a:lstStyle/>
+                    <a:p>
+                      <a:r>
+                        <a:rPr sz="1150" b="1">
+                          <a:solidFill>
+                            <a:srgbClr val="000000"/>
+                          </a:solidFill>
+                        </a:rPr>
+                        <a:t>ポンプ温度</a:t>
+                      </a:r>
+                    </a:p>
+                  </a:txBody>
+                  <a:tcPr anchor="ctr" marT="12700" marB="12700" marL="63500">
+                    <a:solidFill>
+                      <a:srgbClr val="FFFFFF"/>
+                    </a:solidFill>
+                  </a:tcPr>
+                </a:tc>
+                <a:tc>
+                  <a:txBody>
+                    <a:bodyPr wrap="square"/>
+                    <a:lstStyle/>
+                    <a:p>
+                      <a:r>
+                        <a:rPr sz="1150" b="0">
+                          <a:solidFill>
+                            <a:srgbClr val="000000"/>
+                          </a:solidFill>
+                        </a:rPr>
+                        <a:t>158.8 ℃（実績 約150〜160℃）</a:t>
+                      </a:r>
+                    </a:p>
+                  </a:txBody>
+                  <a:tcPr anchor="ctr" marT="12700" marB="12700" marL="63500">
+                    <a:solidFill>
+                      <a:srgbClr val="FFFFFF"/>
+                    </a:solidFill>
+                  </a:tcPr>
+                </a:tc>
+              </a:tr>
+              <a:tr h="274320">
+                <a:tc>
+                  <a:txBody>
+                    <a:bodyPr wrap="square"/>
+                    <a:lstStyle/>
+                    <a:p>
+                      <a:r>
+                        <a:rPr sz="1150" b="1">
+                          <a:solidFill>
+                            <a:srgbClr val="000000"/>
+                          </a:solidFill>
+                        </a:rPr>
+                        <a:t>規定容量</a:t>
+                      </a:r>
+                    </a:p>
+                  </a:txBody>
+                  <a:tcPr anchor="ctr" marT="12700" marB="12700" marL="63500">
+                    <a:solidFill>
+                      <a:srgbClr val="FFFFFF"/>
+                    </a:solidFill>
+                  </a:tcPr>
+                </a:tc>
+                <a:tc>
+                  <a:txBody>
+                    <a:bodyPr wrap="square"/>
+                    <a:lstStyle/>
+                    <a:p>
+                      <a:r>
+                        <a:rPr sz="1150" b="0">
+                          <a:solidFill>
+                            <a:srgbClr val="000000"/>
+                          </a:solidFill>
+                        </a:rPr>
+                        <a:t>9.8 m³/h（運転 約2.3〜2.7 m³/h）</a:t>
+                      </a:r>
+                    </a:p>
+                  </a:txBody>
+                  <a:tcPr anchor="ctr" marT="12700" marB="12700" marL="63500">
+                    <a:solidFill>
+                      <a:srgbClr val="FFFFFF"/>
+                    </a:solidFill>
+                  </a:tcPr>
+                </a:tc>
+              </a:tr>
+              <a:tr h="274320">
+                <a:tc>
+                  <a:txBody>
+                    <a:bodyPr wrap="square"/>
+                    <a:lstStyle/>
+                    <a:p>
+                      <a:r>
+                        <a:rPr sz="1150" b="1">
+                          <a:solidFill>
+                            <a:srgbClr val="000000"/>
+                          </a:solidFill>
+                        </a:rPr>
+                        <a:t>揚程</a:t>
+                      </a:r>
+                    </a:p>
+                  </a:txBody>
+                  <a:tcPr anchor="ctr" marT="12700" marB="12700" marL="63500">
+                    <a:solidFill>
+                      <a:srgbClr val="FFFFFF"/>
+                    </a:solidFill>
+                  </a:tcPr>
+                </a:tc>
+                <a:tc>
+                  <a:txBody>
+                    <a:bodyPr wrap="square"/>
+                    <a:lstStyle/>
+                    <a:p>
+                      <a:r>
+                        <a:rPr sz="1150" b="0">
+                          <a:solidFill>
+                            <a:srgbClr val="000000"/>
+                          </a:solidFill>
+                        </a:rPr>
+                        <a:t>約61 m（吐出圧 約6.17 kg/cm²G）</a:t>
+                      </a:r>
+                    </a:p>
+                  </a:txBody>
+                  <a:tcPr anchor="ctr" marT="12700" marB="12700" marL="63500">
+                    <a:solidFill>
+                      <a:srgbClr val="FFFFFF"/>
+                    </a:solidFill>
+                  </a:tcPr>
+                </a:tc>
+              </a:tr>
+            </a:tbl>
+          </a:graphicData>
+        </a:graphic>
+      </p:graphicFrame>
+      <p:graphicFrame>
+        <p:nvGraphicFramePr>
+          <p:cNvPr id="4" name="Table 3"/>
+          <p:cNvGraphicFramePr>
+            <a:graphicFrameLocks noGrp="1"/>
+          </p:cNvGraphicFramePr>
           <p:nvPr/>
-        </p:nvSpPr>
-        <p:spPr>
-          <a:xfrm>
-            <a:off x="6400800" y="1005840"/>
-            <a:ext cx="5394960" cy="5120640"/>
-          </a:xfrm>
-          <a:prstGeom prst="rect">
-            <a:avLst/>
-          </a:prstGeom>
-          <a:noFill/>
-        </p:spPr>
-        <p:txBody>
-          <a:bodyPr wrap="square">
-            <a:spAutoFit/>
-          </a:bodyPr>
-          <a:lstStyle/>
-          <a:p>
-            <a:r>
-              <a:rPr b="1" sz="1500"/>
-              <a:t>DEG物性（Aspen＠158.8℃）</a:t>
-            </a:r>
-          </a:p>
-          <a:p>
-            <a:r>
-              <a:rPr b="1" sz="1400"/>
-              <a:t>密度 ρ</a:t>
-            </a:r>
-            <a:r>
-              <a:rPr sz="1400"/>
-              <a:t>：約1010 kg/m³（SG≈1.01）</a:t>
-            </a:r>
-          </a:p>
-          <a:p>
-            <a:r>
-              <a:rPr b="1" sz="1400"/>
-              <a:t>粘度 μ</a:t>
-            </a:r>
-            <a:r>
-              <a:rPr sz="1400"/>
-              <a:t>：約1.16 cP</a:t>
-            </a:r>
-          </a:p>
-          <a:p>
-            <a:r>
-              <a:rPr b="1" sz="1400"/>
-              <a:t>蒸気圧 Pvp</a:t>
-            </a:r>
-            <a:r>
-              <a:rPr sz="1400"/>
-              <a:t>：約5.5 kPa</a:t>
-            </a:r>
-          </a:p>
-          <a:p>
-            <a:r>
-              <a:rPr b="1" sz="1400"/>
-              <a:t/>
-            </a:r>
-          </a:p>
-          <a:p>
-            <a:r>
-              <a:rPr b="1" sz="1500"/>
-              <a:t>NPSH／キャビ余裕</a:t>
-            </a:r>
-          </a:p>
-          <a:p>
-            <a:r>
-              <a:rPr b="1" sz="1400"/>
-              <a:t>NPSHa</a:t>
-            </a:r>
-            <a:r>
-              <a:rPr sz="1400"/>
-              <a:t>：14.0 m ／ NPSHr 2.20 m（荏原 RM17156-13）</a:t>
-            </a:r>
-          </a:p>
-          <a:p>
-            <a:r>
-              <a:rPr b="1" sz="1400"/>
-              <a:t>余裕</a:t>
-            </a:r>
-            <a:r>
-              <a:rPr sz="1400"/>
-              <a:t>：11.8 m ≒ 117 kPa（＝許容差圧上昇）</a:t>
-            </a:r>
-          </a:p>
-          <a:p>
-            <a:r>
-              <a:rPr b="1" sz="1400"/>
-              <a:t/>
-            </a:r>
-          </a:p>
-          <a:p>
-            <a:r>
-              <a:rPr b="1" sz="1500"/>
-              <a:t>吸入ストレーナ（変更対象）</a:t>
-            </a:r>
-          </a:p>
-          <a:p>
-            <a:r>
-              <a:rPr b="1" sz="1400"/>
-              <a:t>形式</a:t>
-            </a:r>
-            <a:r>
-              <a:rPr sz="1400"/>
-              <a:t>：YAC EWPCL-150S 円錐型 2B</a:t>
-            </a:r>
-          </a:p>
-          <a:p>
-            <a:r>
-              <a:rPr b="1" sz="1400"/>
-              <a:t>ろ過面積</a:t>
-            </a:r>
-            <a:r>
-              <a:rPr sz="1400"/>
-              <a:t>：≒101 cm²（図面寸法より円錐側面積）</a:t>
-            </a:r>
-          </a:p>
-          <a:p>
-            <a:r>
-              <a:rPr b="1" sz="1400"/>
-              <a:t>メッシュ</a:t>
-            </a:r>
-            <a:r>
-              <a:rPr sz="1400"/>
-              <a:t>：40→250（目開き62μm）</a:t>
-            </a:r>
-          </a:p>
-          <a:p>
-            <a:r>
-              <a:rPr b="1" sz="1400"/>
-              <a:t/>
-            </a:r>
-          </a:p>
-          <a:p>
-            <a:r>
-              <a:rPr b="1" sz="1500"/>
-              <a:t>下流制御弁</a:t>
-            </a:r>
-          </a:p>
-          <a:p>
-            <a:r>
-              <a:rPr b="1" sz="1400"/>
-              <a:t>FC-1531</a:t>
-            </a:r>
-            <a:r>
-              <a:rPr sz="1400"/>
-              <a:t>：Azbil AGVB（Cv定格21）</a:t>
-            </a:r>
-          </a:p>
-          <a:p>
-            <a:r>
-              <a:rPr b="1" sz="1400"/>
-              <a:t>FC-1535</a:t>
-            </a:r>
-            <a:r>
-              <a:rPr sz="1400"/>
-              <a:t>：Azbil AGVB（Cv4.0）</a:t>
-            </a:r>
-          </a:p>
-        </p:txBody>
-      </p:sp>
+        </p:nvGraphicFramePr>
+        <p:xfrm>
+          <a:off x="6355080" y="1051560"/>
+          <a:ext cx="5440679" cy="3840480"/>
+        </p:xfrm>
+        <a:graphic>
+          <a:graphicData uri="http://schemas.openxmlformats.org/drawingml/2006/table">
+            <a:tbl>
+              <a:tblPr firstRow="0" bandRow="0">
+                <a:tableStyleId>{5940675A-B579-460E-94D1-54222C63F5DA}</a:tableStyleId>
+              </a:tblPr>
+              <a:tblGrid>
+                <a:gridCol w="1691640"/>
+                <a:gridCol w="3749039"/>
+              </a:tblGrid>
+              <a:tr h="274320">
+                <a:tc gridSpan="2">
+                  <a:txBody>
+                    <a:bodyPr wrap="square"/>
+                    <a:lstStyle/>
+                    <a:p>
+                      <a:r>
+                        <a:rPr b="1" sz="1200">
+                          <a:solidFill>
+                            <a:srgbClr val="000000"/>
+                          </a:solidFill>
+                        </a:rPr>
+                        <a:t>■ DEG物性（Aspen＠158.8℃）</a:t>
+                      </a:r>
+                    </a:p>
+                  </a:txBody>
+                  <a:tcPr anchor="ctr" marT="12700" marB="12700">
+                    <a:solidFill>
+                      <a:srgbClr val="D9D9D9"/>
+                    </a:solidFill>
+                  </a:tcPr>
+                </a:tc>
+                <a:tc hMerge="1">
+                  <a:txBody>
+                    <a:bodyPr/>
+                    <a:lstStyle/>
+                    <a:p/>
+                  </a:txBody>
+                  <a:tcPr/>
+                </a:tc>
+              </a:tr>
+              <a:tr h="274320">
+                <a:tc>
+                  <a:txBody>
+                    <a:bodyPr wrap="square"/>
+                    <a:lstStyle/>
+                    <a:p>
+                      <a:r>
+                        <a:rPr sz="1150" b="1">
+                          <a:solidFill>
+                            <a:srgbClr val="000000"/>
+                          </a:solidFill>
+                        </a:rPr>
+                        <a:t>密度 ρ</a:t>
+                      </a:r>
+                    </a:p>
+                  </a:txBody>
+                  <a:tcPr anchor="ctr" marT="12700" marB="12700" marL="63500">
+                    <a:solidFill>
+                      <a:srgbClr val="FFFFFF"/>
+                    </a:solidFill>
+                  </a:tcPr>
+                </a:tc>
+                <a:tc>
+                  <a:txBody>
+                    <a:bodyPr wrap="square"/>
+                    <a:lstStyle/>
+                    <a:p>
+                      <a:r>
+                        <a:rPr sz="1150" b="0">
+                          <a:solidFill>
+                            <a:srgbClr val="000000"/>
+                          </a:solidFill>
+                        </a:rPr>
+                        <a:t>約1010 kg/m³（SG≈1.01）</a:t>
+                      </a:r>
+                    </a:p>
+                  </a:txBody>
+                  <a:tcPr anchor="ctr" marT="12700" marB="12700" marL="63500">
+                    <a:solidFill>
+                      <a:srgbClr val="FFFFFF"/>
+                    </a:solidFill>
+                  </a:tcPr>
+                </a:tc>
+              </a:tr>
+              <a:tr h="274320">
+                <a:tc>
+                  <a:txBody>
+                    <a:bodyPr wrap="square"/>
+                    <a:lstStyle/>
+                    <a:p>
+                      <a:r>
+                        <a:rPr sz="1150" b="1">
+                          <a:solidFill>
+                            <a:srgbClr val="000000"/>
+                          </a:solidFill>
+                        </a:rPr>
+                        <a:t>粘度 μ</a:t>
+                      </a:r>
+                    </a:p>
+                  </a:txBody>
+                  <a:tcPr anchor="ctr" marT="12700" marB="12700" marL="63500">
+                    <a:solidFill>
+                      <a:srgbClr val="FFFFFF"/>
+                    </a:solidFill>
+                  </a:tcPr>
+                </a:tc>
+                <a:tc>
+                  <a:txBody>
+                    <a:bodyPr wrap="square"/>
+                    <a:lstStyle/>
+                    <a:p>
+                      <a:r>
+                        <a:rPr sz="1150" b="0">
+                          <a:solidFill>
+                            <a:srgbClr val="000000"/>
+                          </a:solidFill>
+                        </a:rPr>
+                        <a:t>約1.16 cP</a:t>
+                      </a:r>
+                    </a:p>
+                  </a:txBody>
+                  <a:tcPr anchor="ctr" marT="12700" marB="12700" marL="63500">
+                    <a:solidFill>
+                      <a:srgbClr val="FFFFFF"/>
+                    </a:solidFill>
+                  </a:tcPr>
+                </a:tc>
+              </a:tr>
+              <a:tr h="274320">
+                <a:tc>
+                  <a:txBody>
+                    <a:bodyPr wrap="square"/>
+                    <a:lstStyle/>
+                    <a:p>
+                      <a:r>
+                        <a:rPr sz="1150" b="1">
+                          <a:solidFill>
+                            <a:srgbClr val="000000"/>
+                          </a:solidFill>
+                        </a:rPr>
+                        <a:t>蒸気圧 Pvp</a:t>
+                      </a:r>
+                    </a:p>
+                  </a:txBody>
+                  <a:tcPr anchor="ctr" marT="12700" marB="12700" marL="63500">
+                    <a:solidFill>
+                      <a:srgbClr val="FFFFFF"/>
+                    </a:solidFill>
+                  </a:tcPr>
+                </a:tc>
+                <a:tc>
+                  <a:txBody>
+                    <a:bodyPr wrap="square"/>
+                    <a:lstStyle/>
+                    <a:p>
+                      <a:r>
+                        <a:rPr sz="1150" b="0">
+                          <a:solidFill>
+                            <a:srgbClr val="000000"/>
+                          </a:solidFill>
+                        </a:rPr>
+                        <a:t>約5.5 kPa</a:t>
+                      </a:r>
+                    </a:p>
+                  </a:txBody>
+                  <a:tcPr anchor="ctr" marT="12700" marB="12700" marL="63500">
+                    <a:solidFill>
+                      <a:srgbClr val="FFFFFF"/>
+                    </a:solidFill>
+                  </a:tcPr>
+                </a:tc>
+              </a:tr>
+              <a:tr h="274320">
+                <a:tc gridSpan="2">
+                  <a:txBody>
+                    <a:bodyPr wrap="square"/>
+                    <a:lstStyle/>
+                    <a:p>
+                      <a:r>
+                        <a:rPr b="1" sz="1200">
+                          <a:solidFill>
+                            <a:srgbClr val="000000"/>
+                          </a:solidFill>
+                        </a:rPr>
+                        <a:t>■ NPSH／キャビ余裕</a:t>
+                      </a:r>
+                    </a:p>
+                  </a:txBody>
+                  <a:tcPr anchor="ctr" marT="12700" marB="12700">
+                    <a:solidFill>
+                      <a:srgbClr val="D9D9D9"/>
+                    </a:solidFill>
+                  </a:tcPr>
+                </a:tc>
+                <a:tc hMerge="1">
+                  <a:txBody>
+                    <a:bodyPr/>
+                    <a:lstStyle/>
+                    <a:p/>
+                  </a:txBody>
+                  <a:tcPr/>
+                </a:tc>
+              </a:tr>
+              <a:tr h="274320">
+                <a:tc>
+                  <a:txBody>
+                    <a:bodyPr wrap="square"/>
+                    <a:lstStyle/>
+                    <a:p>
+                      <a:r>
+                        <a:rPr sz="1150" b="1">
+                          <a:solidFill>
+                            <a:srgbClr val="000000"/>
+                          </a:solidFill>
+                        </a:rPr>
+                        <a:t>NPSHa／NPSHr</a:t>
+                      </a:r>
+                    </a:p>
+                  </a:txBody>
+                  <a:tcPr anchor="ctr" marT="12700" marB="12700" marL="63500">
+                    <a:solidFill>
+                      <a:srgbClr val="FFFFFF"/>
+                    </a:solidFill>
+                  </a:tcPr>
+                </a:tc>
+                <a:tc>
+                  <a:txBody>
+                    <a:bodyPr wrap="square"/>
+                    <a:lstStyle/>
+                    <a:p>
+                      <a:r>
+                        <a:rPr sz="1150" b="0">
+                          <a:solidFill>
+                            <a:srgbClr val="000000"/>
+                          </a:solidFill>
+                        </a:rPr>
+                        <a:t>14.0 m ／ 2.20 m（荏原 RM17156-13）</a:t>
+                      </a:r>
+                    </a:p>
+                  </a:txBody>
+                  <a:tcPr anchor="ctr" marT="12700" marB="12700" marL="63500">
+                    <a:solidFill>
+                      <a:srgbClr val="FFFFFF"/>
+                    </a:solidFill>
+                  </a:tcPr>
+                </a:tc>
+              </a:tr>
+              <a:tr h="274320">
+                <a:tc>
+                  <a:txBody>
+                    <a:bodyPr wrap="square"/>
+                    <a:lstStyle/>
+                    <a:p>
+                      <a:r>
+                        <a:rPr sz="1150" b="1">
+                          <a:solidFill>
+                            <a:srgbClr val="000000"/>
+                          </a:solidFill>
+                        </a:rPr>
+                        <a:t>余裕</a:t>
+                      </a:r>
+                    </a:p>
+                  </a:txBody>
+                  <a:tcPr anchor="ctr" marT="12700" marB="12700" marL="63500">
+                    <a:solidFill>
+                      <a:srgbClr val="FFFFFF"/>
+                    </a:solidFill>
+                  </a:tcPr>
+                </a:tc>
+                <a:tc>
+                  <a:txBody>
+                    <a:bodyPr wrap="square"/>
+                    <a:lstStyle/>
+                    <a:p>
+                      <a:r>
+                        <a:rPr sz="1150" b="0">
+                          <a:solidFill>
+                            <a:srgbClr val="000000"/>
+                          </a:solidFill>
+                        </a:rPr>
+                        <a:t>11.8 m ≒ 117 kPa（＝許容差圧上昇）</a:t>
+                      </a:r>
+                    </a:p>
+                  </a:txBody>
+                  <a:tcPr anchor="ctr" marT="12700" marB="12700" marL="63500">
+                    <a:solidFill>
+                      <a:srgbClr val="FFFFFF"/>
+                    </a:solidFill>
+                  </a:tcPr>
+                </a:tc>
+              </a:tr>
+              <a:tr h="274320">
+                <a:tc gridSpan="2">
+                  <a:txBody>
+                    <a:bodyPr wrap="square"/>
+                    <a:lstStyle/>
+                    <a:p>
+                      <a:r>
+                        <a:rPr b="1" sz="1200">
+                          <a:solidFill>
+                            <a:srgbClr val="000000"/>
+                          </a:solidFill>
+                        </a:rPr>
+                        <a:t>■ 吸入ストレーナ（変更対象）</a:t>
+                      </a:r>
+                    </a:p>
+                  </a:txBody>
+                  <a:tcPr anchor="ctr" marT="12700" marB="12700">
+                    <a:solidFill>
+                      <a:srgbClr val="D9D9D9"/>
+                    </a:solidFill>
+                  </a:tcPr>
+                </a:tc>
+                <a:tc hMerge="1">
+                  <a:txBody>
+                    <a:bodyPr/>
+                    <a:lstStyle/>
+                    <a:p/>
+                  </a:txBody>
+                  <a:tcPr/>
+                </a:tc>
+              </a:tr>
+              <a:tr h="274320">
+                <a:tc>
+                  <a:txBody>
+                    <a:bodyPr wrap="square"/>
+                    <a:lstStyle/>
+                    <a:p>
+                      <a:r>
+                        <a:rPr sz="1150" b="1">
+                          <a:solidFill>
+                            <a:srgbClr val="000000"/>
+                          </a:solidFill>
+                        </a:rPr>
+                        <a:t>形式</a:t>
+                      </a:r>
+                    </a:p>
+                  </a:txBody>
+                  <a:tcPr anchor="ctr" marT="12700" marB="12700" marL="63500">
+                    <a:solidFill>
+                      <a:srgbClr val="FFFFFF"/>
+                    </a:solidFill>
+                  </a:tcPr>
+                </a:tc>
+                <a:tc>
+                  <a:txBody>
+                    <a:bodyPr wrap="square"/>
+                    <a:lstStyle/>
+                    <a:p>
+                      <a:r>
+                        <a:rPr sz="1150" b="0">
+                          <a:solidFill>
+                            <a:srgbClr val="000000"/>
+                          </a:solidFill>
+                        </a:rPr>
+                        <a:t>YAC EWPCL-150S 円錐型 2B</a:t>
+                      </a:r>
+                    </a:p>
+                  </a:txBody>
+                  <a:tcPr anchor="ctr" marT="12700" marB="12700" marL="63500">
+                    <a:solidFill>
+                      <a:srgbClr val="FFFFFF"/>
+                    </a:solidFill>
+                  </a:tcPr>
+                </a:tc>
+              </a:tr>
+              <a:tr h="274320">
+                <a:tc>
+                  <a:txBody>
+                    <a:bodyPr wrap="square"/>
+                    <a:lstStyle/>
+                    <a:p>
+                      <a:r>
+                        <a:rPr sz="1150" b="1">
+                          <a:solidFill>
+                            <a:srgbClr val="000000"/>
+                          </a:solidFill>
+                        </a:rPr>
+                        <a:t>ろ過面積</a:t>
+                      </a:r>
+                    </a:p>
+                  </a:txBody>
+                  <a:tcPr anchor="ctr" marT="12700" marB="12700" marL="63500">
+                    <a:solidFill>
+                      <a:srgbClr val="FFFFFF"/>
+                    </a:solidFill>
+                  </a:tcPr>
+                </a:tc>
+                <a:tc>
+                  <a:txBody>
+                    <a:bodyPr wrap="square"/>
+                    <a:lstStyle/>
+                    <a:p>
+                      <a:r>
+                        <a:rPr sz="1150" b="0">
+                          <a:solidFill>
+                            <a:srgbClr val="000000"/>
+                          </a:solidFill>
+                        </a:rPr>
+                        <a:t>≒101 cm²（図面寸法より円錐側面積）</a:t>
+                      </a:r>
+                    </a:p>
+                  </a:txBody>
+                  <a:tcPr anchor="ctr" marT="12700" marB="12700" marL="63500">
+                    <a:solidFill>
+                      <a:srgbClr val="FFFFFF"/>
+                    </a:solidFill>
+                  </a:tcPr>
+                </a:tc>
+              </a:tr>
+              <a:tr h="274320">
+                <a:tc>
+                  <a:txBody>
+                    <a:bodyPr wrap="square"/>
+                    <a:lstStyle/>
+                    <a:p>
+                      <a:r>
+                        <a:rPr sz="1150" b="1">
+                          <a:solidFill>
+                            <a:srgbClr val="000000"/>
+                          </a:solidFill>
+                        </a:rPr>
+                        <a:t>メッシュ</a:t>
+                      </a:r>
+                    </a:p>
+                  </a:txBody>
+                  <a:tcPr anchor="ctr" marT="12700" marB="12700" marL="63500">
+                    <a:solidFill>
+                      <a:srgbClr val="FFFFFF"/>
+                    </a:solidFill>
+                  </a:tcPr>
+                </a:tc>
+                <a:tc>
+                  <a:txBody>
+                    <a:bodyPr wrap="square"/>
+                    <a:lstStyle/>
+                    <a:p>
+                      <a:r>
+                        <a:rPr sz="1150" b="0">
+                          <a:solidFill>
+                            <a:srgbClr val="000000"/>
+                          </a:solidFill>
+                        </a:rPr>
+                        <a:t>40→250（目開き62μm）</a:t>
+                      </a:r>
+                    </a:p>
+                  </a:txBody>
+                  <a:tcPr anchor="ctr" marT="12700" marB="12700" marL="63500">
+                    <a:solidFill>
+                      <a:srgbClr val="FFFFFF"/>
+                    </a:solidFill>
+                  </a:tcPr>
+                </a:tc>
+              </a:tr>
+              <a:tr h="274320">
+                <a:tc gridSpan="2">
+                  <a:txBody>
+                    <a:bodyPr wrap="square"/>
+                    <a:lstStyle/>
+                    <a:p>
+                      <a:r>
+                        <a:rPr b="1" sz="1200">
+                          <a:solidFill>
+                            <a:srgbClr val="000000"/>
+                          </a:solidFill>
+                        </a:rPr>
+                        <a:t>■ 下流制御弁</a:t>
+                      </a:r>
+                    </a:p>
+                  </a:txBody>
+                  <a:tcPr anchor="ctr" marT="12700" marB="12700">
+                    <a:solidFill>
+                      <a:srgbClr val="D9D9D9"/>
+                    </a:solidFill>
+                  </a:tcPr>
+                </a:tc>
+                <a:tc hMerge="1">
+                  <a:txBody>
+                    <a:bodyPr/>
+                    <a:lstStyle/>
+                    <a:p/>
+                  </a:txBody>
+                  <a:tcPr/>
+                </a:tc>
+              </a:tr>
+              <a:tr h="274320">
+                <a:tc>
+                  <a:txBody>
+                    <a:bodyPr wrap="square"/>
+                    <a:lstStyle/>
+                    <a:p>
+                      <a:r>
+                        <a:rPr sz="1150" b="1">
+                          <a:solidFill>
+                            <a:srgbClr val="000000"/>
+                          </a:solidFill>
+                        </a:rPr>
+                        <a:t>FC-1531</a:t>
+                      </a:r>
+                    </a:p>
+                  </a:txBody>
+                  <a:tcPr anchor="ctr" marT="12700" marB="12700" marL="63500">
+                    <a:solidFill>
+                      <a:srgbClr val="FFFFFF"/>
+                    </a:solidFill>
+                  </a:tcPr>
+                </a:tc>
+                <a:tc>
+                  <a:txBody>
+                    <a:bodyPr wrap="square"/>
+                    <a:lstStyle/>
+                    <a:p>
+                      <a:r>
+                        <a:rPr sz="1150" b="0">
+                          <a:solidFill>
+                            <a:srgbClr val="000000"/>
+                          </a:solidFill>
+                        </a:rPr>
+                        <a:t>Azbil AGVB（Cv定格21）</a:t>
+                      </a:r>
+                    </a:p>
+                  </a:txBody>
+                  <a:tcPr anchor="ctr" marT="12700" marB="12700" marL="63500">
+                    <a:solidFill>
+                      <a:srgbClr val="FFFFFF"/>
+                    </a:solidFill>
+                  </a:tcPr>
+                </a:tc>
+              </a:tr>
+              <a:tr h="274320">
+                <a:tc>
+                  <a:txBody>
+                    <a:bodyPr wrap="square"/>
+                    <a:lstStyle/>
+                    <a:p>
+                      <a:r>
+                        <a:rPr sz="1150" b="1">
+                          <a:solidFill>
+                            <a:srgbClr val="000000"/>
+                          </a:solidFill>
+                        </a:rPr>
+                        <a:t>FC-1535</a:t>
+                      </a:r>
+                    </a:p>
+                  </a:txBody>
+                  <a:tcPr anchor="ctr" marT="12700" marB="12700" marL="63500">
+                    <a:solidFill>
+                      <a:srgbClr val="FFFFFF"/>
+                    </a:solidFill>
+                  </a:tcPr>
+                </a:tc>
+                <a:tc>
+                  <a:txBody>
+                    <a:bodyPr wrap="square"/>
+                    <a:lstStyle/>
+                    <a:p>
+                      <a:r>
+                        <a:rPr sz="1150" b="0">
+                          <a:solidFill>
+                            <a:srgbClr val="000000"/>
+                          </a:solidFill>
+                        </a:rPr>
+                        <a:t>Azbil AGVB（Cv4.0）</a:t>
+                      </a:r>
+                    </a:p>
+                  </a:txBody>
+                  <a:tcPr anchor="ctr" marT="12700" marB="12700" marL="63500">
+                    <a:solidFill>
+                      <a:srgbClr val="FFFFFF"/>
+                    </a:solidFill>
+                  </a:tcPr>
+                </a:tc>
+              </a:tr>
+            </a:tbl>
+          </a:graphicData>
+        </a:graphic>
+      </p:graphicFrame>
       <p:sp>
         <p:nvSpPr>
           <p:cNvPr id="5" name="TextBox 4"/>
@@ -18826,8 +19560,8 @@
         </p:nvSpPr>
         <p:spPr>
           <a:xfrm>
-            <a:off x="457200" y="6199632"/>
-            <a:ext cx="11247120" cy="411480"/>
+            <a:off x="411480" y="6263640"/>
+            <a:ext cx="11338560" cy="365760"/>
           </a:xfrm>
           <a:prstGeom prst="rect">
             <a:avLst/>
@@ -18835,13 +19569,17 @@
           <a:noFill/>
         </p:spPr>
         <p:txBody>
-          <a:bodyPr wrap="square">
+          <a:bodyPr wrap="none">
             <a:spAutoFit/>
           </a:bodyPr>
           <a:lstStyle/>
           <a:p>
             <a:r>
-              <a:rPr sz="1000" i="1"/>
+              <a:rPr sz="1000" i="1">
+                <a:solidFill>
+                  <a:srgbClr val="000000"/>
+                </a:solidFill>
+              </a:rPr>
               <a:t>出典：三菱重工 ポンプデータシート(図番3444 J702-00046)、荏原性能試験RM17156-13、Aspen物性、ストレーナ/ポンプ図面</a:t>
             </a:r>
           </a:p>
